--- a/social/open-house-2026-10-16/open-house-oct16-v2-editable.pptx
+++ b/social/open-house-2026-10-16/open-house-oct16-v2-editable.pptx
@@ -973,7 +973,7 @@
       </p:pic>
       <p:pic>
         <p:nvPicPr>
-          <p:cNvPr id="6" name="laptop-webinar" descr="laptop webinar">    </p:cNvPr>
+          <p:cNvPr id="6" name="laptop-webinar-video" descr="laptop webinar video">    </p:cNvPr>
           <p:cNvPicPr>
             <a:picLocks noChangeAspect="1"/>
           </p:cNvPicPr>
@@ -1499,33 +1499,9 @@
           </a:prstGeom>
         </p:spPr>
       </p:pic>
-      <p:pic>
-        <p:nvPicPr>
-          <p:cNvPr id="28" name="kicker-rule" descr="kicker rule">    </p:cNvPr>
-          <p:cNvPicPr>
-            <a:picLocks noChangeAspect="1"/>
-          </p:cNvPicPr>
-          <p:nvPr/>
-        </p:nvPicPr>
-        <p:blipFill>
-          <a:blip r:embed="rId27"/>
-          <a:stretch>
-            <a:fillRect/>
-          </a:stretch>
-        </p:blipFill>
-        <p:spPr>
-          <a:xfrm>
-            <a:off x="592667" y="846667"/>
-            <a:ext cx="7967133" cy="16933"/>
-          </a:xfrm>
-          <a:prstGeom prst="rect">
-            <a:avLst/>
-          </a:prstGeom>
-        </p:spPr>
-      </p:pic>
       <p:sp>
         <p:nvSpPr>
-          <p:cNvPr id="29" name="date-pill"/>
+          <p:cNvPr id="28" name="date-pill"/>
           <p:cNvSpPr/>
           <p:nvPr/>
         </p:nvSpPr>
@@ -1552,7 +1528,7 @@
       </p:sp>
       <p:sp>
         <p:nvSpPr>
-          <p:cNvPr id="30" name="label-nematode"/>
+          <p:cNvPr id="29" name="label-nematode"/>
           <p:cNvSpPr txBox="1"/>
           <p:nvPr/>
         </p:nvSpPr>
@@ -1591,7 +1567,7 @@
       </p:sp>
       <p:sp>
         <p:nvSpPr>
-          <p:cNvPr id="31" name="label-ciliate"/>
+          <p:cNvPr id="30" name="label-ciliate"/>
           <p:cNvSpPr txBox="1"/>
           <p:nvPr/>
         </p:nvSpPr>
@@ -1630,7 +1606,7 @@
       </p:sp>
       <p:sp>
         <p:nvSpPr>
-          <p:cNvPr id="32" name="label-fungal-hypha"/>
+          <p:cNvPr id="31" name="label-fungal-hypha"/>
           <p:cNvSpPr txBox="1"/>
           <p:nvPr/>
         </p:nvSpPr>
@@ -1669,7 +1645,7 @@
       </p:sp>
       <p:sp>
         <p:nvSpPr>
-          <p:cNvPr id="33" name="label-amoeba"/>
+          <p:cNvPr id="32" name="label-amoeba"/>
           <p:cNvSpPr txBox="1"/>
           <p:nvPr/>
         </p:nvSpPr>
@@ -1708,7 +1684,7 @@
       </p:sp>
       <p:sp>
         <p:nvSpPr>
-          <p:cNvPr id="34" name="label-testate-amoeba"/>
+          <p:cNvPr id="33" name="label-testate-amoeba"/>
           <p:cNvSpPr txBox="1"/>
           <p:nvPr/>
         </p:nvSpPr>
@@ -1747,85 +1723,7 @@
       </p:sp>
       <p:sp>
         <p:nvSpPr>
-          <p:cNvPr id="35" name="kicker-left"/>
-          <p:cNvSpPr txBox="1"/>
-          <p:nvPr/>
-        </p:nvSpPr>
-        <p:spPr>
-          <a:xfrm>
-            <a:off x="592667" y="491067"/>
-            <a:ext cx="4402667" cy="287867"/>
-          </a:xfrm>
-          <a:prstGeom prst="rect">
-            <a:avLst/>
-          </a:prstGeom>
-          <a:noFill/>
-          <a:ln/>
-        </p:spPr>
-        <p:txBody>
-          <a:bodyPr wrap="none" lIns="0" tIns="0" rIns="0" bIns="0" rtlCol="0" anchor="t"/>
-          <a:lstStyle/>
-          <a:p>
-            <a:pPr algn="l" indent="0" marL="0">
-              <a:buNone/>
-            </a:pPr>
-            <a:r>
-              <a:rPr lang="en-US" sz="1400" b="1" dirty="0">
-                <a:solidFill>
-                  <a:srgbClr val="22371F"/>
-                </a:solidFill>
-                <a:latin typeface="Montserrat" pitchFamily="34" charset="0"/>
-                <a:ea typeface="Montserrat" pitchFamily="34" charset="-122"/>
-                <a:cs typeface="Montserrat" pitchFamily="34" charset="-120"/>
-              </a:rPr>
-              <a:t>SOIL FOOD WEB FOUNDATION</a:t>
-            </a:r>
-            <a:endParaRPr lang="en-US" sz="1400" dirty="0"/>
-          </a:p>
-        </p:txBody>
-      </p:sp>
-      <p:sp>
-        <p:nvSpPr>
-          <p:cNvPr id="36" name="kicker-right"/>
-          <p:cNvSpPr txBox="1"/>
-          <p:nvPr/>
-        </p:nvSpPr>
-        <p:spPr>
-          <a:xfrm>
-            <a:off x="6011333" y="491067"/>
-            <a:ext cx="2540000" cy="287867"/>
-          </a:xfrm>
-          <a:prstGeom prst="rect">
-            <a:avLst/>
-          </a:prstGeom>
-          <a:noFill/>
-          <a:ln/>
-        </p:spPr>
-        <p:txBody>
-          <a:bodyPr wrap="none" lIns="0" tIns="0" rIns="0" bIns="0" rtlCol="0" anchor="t"/>
-          <a:lstStyle/>
-          <a:p>
-            <a:pPr algn="r" indent="0" marL="0">
-              <a:buNone/>
-            </a:pPr>
-            <a:r>
-              <a:rPr lang="en-US" sz="1400" b="1" dirty="0">
-                <a:solidFill>
-                  <a:srgbClr val="22371F"/>
-                </a:solidFill>
-                <a:latin typeface="Montserrat" pitchFamily="34" charset="0"/>
-                <a:ea typeface="Montserrat" pitchFamily="34" charset="-122"/>
-                <a:cs typeface="Montserrat" pitchFamily="34" charset="-120"/>
-              </a:rPr>
-              <a:t>TURNING ONE</a:t>
-            </a:r>
-            <a:endParaRPr lang="en-US" sz="1400" dirty="0"/>
-          </a:p>
-        </p:txBody>
-      </p:sp>
-      <p:sp>
-        <p:nvSpPr>
-          <p:cNvPr id="37" name="headline"/>
+          <p:cNvPr id="34" name="headline"/>
           <p:cNvSpPr txBox="1"/>
           <p:nvPr/>
         </p:nvSpPr>
@@ -1864,7 +1762,7 @@
       </p:sp>
       <p:sp>
         <p:nvSpPr>
-          <p:cNvPr id="38" name="subline"/>
+          <p:cNvPr id="35" name="subline"/>
           <p:cNvSpPr txBox="1"/>
           <p:nvPr/>
         </p:nvSpPr>
@@ -1903,7 +1801,7 @@
       </p:sp>
       <p:sp>
         <p:nvSpPr>
-          <p:cNvPr id="39" name="date"/>
+          <p:cNvPr id="36" name="date"/>
           <p:cNvSpPr txBox="1"/>
           <p:nvPr/>
         </p:nvSpPr>
